--- a/neerlandais1/powerpoints/Module_28_Zich_of_elkaar.pptx
+++ b/neerlandais1/powerpoints/Module_28_Zich_of_elkaar.pptx
@@ -133,18 +133,18 @@
   <p:extLst>
     <p:ext uri="{521415D9-36F7-43E2-AB2F-B90AF26B5E84}">
       <p14:sectionLst xmlns:p14="http://schemas.microsoft.com/office/powerpoint/2010/main">
-        <p14:section name="Ouverture" id="{8879f51e-8f14-a627-1acb-37ec292de63a}">
+        <p14:section name="Ouverture" id="{335383ff-c738-65a1-9fec-608439efe15b}">
           <p14:sldIdLst>
             <p14:sldId id="256"/>
           </p14:sldIdLst>
         </p14:section>
-        <p14:section name="Découvrir" id="{2dabc978-cb7d-4d1f-3879-9dcde5328235}">
+        <p14:section name="Découvrir" id="{5ab63227-34d5-30ca-6e7d-74c047abc7cf}">
           <p14:sldIdLst>
             <p14:sldId id="257"/>
             <p14:sldId id="258"/>
           </p14:sldIdLst>
         </p14:section>
-        <p14:section name="Comprendre" id="{8ef65a7d-d85f-45fe-8714-226f3c9d3158}">
+        <p14:section name="Comprendre" id="{ef51945e-9783-14df-b1c3-90b8a765b6b0}">
           <p14:sldIdLst>
             <p14:sldId id="259"/>
             <p14:sldId id="260"/>
@@ -158,7 +158,7 @@
             <p14:sldId id="268"/>
           </p14:sldIdLst>
         </p14:section>
-        <p14:section name="JIJ NU ! — Oefeningen" id="{9502879a-ab0b-95ac-66f2-8b68ea83e1be}">
+        <p14:section name="JIJ NU ! — Oefeningen" id="{6df3e703-a19f-fe1c-3726-6383fb64f7e4}">
           <p14:sldIdLst>
             <p14:sldId id="269"/>
             <p14:sldId id="270"/>
@@ -175,7 +175,7 @@
             <p14:sldId id="281"/>
           </p14:sldIdLst>
         </p14:section>
-        <p14:section name="Clôture" id="{cc0e9aea-7a3f-6c1b-291a-4d423d77dc6e}">
+        <p14:section name="Clôture" id="{8cee45e9-e7b6-c27a-0d7c-1c5f5372c0f0}">
           <p14:sldIdLst>
             <p14:sldId id="282"/>
           </p14:sldIdLst>
@@ -3806,7 +3806,7 @@
                   <a:srgbClr val="FFFFFF"/>
                 </a:solidFill>
               </a:rPr>
-              <a:t>MODULE 28 / 29</a:t>
+              <a:t>MODULE 28 / 32</a:t>
             </a:r>
             <a:endParaRPr lang="en-US" sz="1400" dirty="0"/>
           </a:p>
@@ -23543,7 +23543,7 @@
                   <a:schemeClr val="tx1"/>
                 </a:solidFill>
               </a:rPr>
-              <a:t>Bolero · Leuven</a:t>
+              <a:t>Koopzo · Leuven</a:t>
             </a:r>
             <a:endParaRPr lang="en-US" sz="1200" dirty="0"/>
           </a:p>

--- a/neerlandais1/powerpoints/Module_28_Zich_of_elkaar.pptx
+++ b/neerlandais1/powerpoints/Module_28_Zich_of_elkaar.pptx
@@ -133,18 +133,18 @@
   <p:extLst>
     <p:ext uri="{521415D9-36F7-43E2-AB2F-B90AF26B5E84}">
       <p14:sectionLst xmlns:p14="http://schemas.microsoft.com/office/powerpoint/2010/main">
-        <p14:section name="Ouverture" id="{335383ff-c738-65a1-9fec-608439efe15b}">
+        <p14:section name="Ouverture" id="{4cce8fea-6d56-3319-603b-0858048c9f65}">
           <p14:sldIdLst>
             <p14:sldId id="256"/>
           </p14:sldIdLst>
         </p14:section>
-        <p14:section name="Découvrir" id="{5ab63227-34d5-30ca-6e7d-74c047abc7cf}">
+        <p14:section name="Découvrir" id="{cf76e9a3-fc11-7953-0805-c30c56e7c975}">
           <p14:sldIdLst>
             <p14:sldId id="257"/>
             <p14:sldId id="258"/>
           </p14:sldIdLst>
         </p14:section>
-        <p14:section name="Comprendre" id="{ef51945e-9783-14df-b1c3-90b8a765b6b0}">
+        <p14:section name="Comprendre" id="{e310bfbd-2d37-52c8-1b4b-90611f77a709}">
           <p14:sldIdLst>
             <p14:sldId id="259"/>
             <p14:sldId id="260"/>
@@ -158,7 +158,7 @@
             <p14:sldId id="268"/>
           </p14:sldIdLst>
         </p14:section>
-        <p14:section name="JIJ NU ! — Oefeningen" id="{6df3e703-a19f-fe1c-3726-6383fb64f7e4}">
+        <p14:section name="JIJ NU ! — Oefeningen" id="{d734b8e9-de45-3cec-db5d-f6234384bff7}">
           <p14:sldIdLst>
             <p14:sldId id="269"/>
             <p14:sldId id="270"/>
@@ -175,7 +175,7 @@
             <p14:sldId id="281"/>
           </p14:sldIdLst>
         </p14:section>
-        <p14:section name="Clôture" id="{8cee45e9-e7b6-c27a-0d7c-1c5f5372c0f0}">
+        <p14:section name="Clôture" id="{e32c10f5-52c1-4ae2-318d-0013637d2f37}">
           <p14:sldIdLst>
             <p14:sldId id="282"/>
           </p14:sldIdLst>

--- a/neerlandais1/powerpoints/Module_28_Zich_of_elkaar.pptx
+++ b/neerlandais1/powerpoints/Module_28_Zich_of_elkaar.pptx
@@ -133,18 +133,18 @@
   <p:extLst>
     <p:ext uri="{521415D9-36F7-43E2-AB2F-B90AF26B5E84}">
       <p14:sectionLst xmlns:p14="http://schemas.microsoft.com/office/powerpoint/2010/main">
-        <p14:section name="Ouverture" id="{4cce8fea-6d56-3319-603b-0858048c9f65}">
+        <p14:section name="Ouverture" id="{dfb2744b-a24f-fded-24e4-36e9200edde5}">
           <p14:sldIdLst>
             <p14:sldId id="256"/>
           </p14:sldIdLst>
         </p14:section>
-        <p14:section name="Découvrir" id="{cf76e9a3-fc11-7953-0805-c30c56e7c975}">
+        <p14:section name="Découvrir" id="{3f485b07-fa99-9fbd-4cb2-fe4e38103a92}">
           <p14:sldIdLst>
             <p14:sldId id="257"/>
             <p14:sldId id="258"/>
           </p14:sldIdLst>
         </p14:section>
-        <p14:section name="Comprendre" id="{e310bfbd-2d37-52c8-1b4b-90611f77a709}">
+        <p14:section name="Comprendre" id="{fe101d61-5583-2788-5f3f-f29df7c75833}">
           <p14:sldIdLst>
             <p14:sldId id="259"/>
             <p14:sldId id="260"/>
@@ -158,7 +158,7 @@
             <p14:sldId id="268"/>
           </p14:sldIdLst>
         </p14:section>
-        <p14:section name="JIJ NU ! — Oefeningen" id="{d734b8e9-de45-3cec-db5d-f6234384bff7}">
+        <p14:section name="JIJ NU ! — Oefeningen" id="{c5f20a2c-6127-90ac-e3b8-c317bfd24f98}">
           <p14:sldIdLst>
             <p14:sldId id="269"/>
             <p14:sldId id="270"/>
@@ -175,7 +175,7 @@
             <p14:sldId id="281"/>
           </p14:sldIdLst>
         </p14:section>
-        <p14:section name="Clôture" id="{e32c10f5-52c1-4ae2-318d-0013637d2f37}">
+        <p14:section name="Clôture" id="{6ca5eb26-e9ff-b53f-1fe8-4a301908b126}">
           <p14:sldIdLst>
             <p14:sldId id="282"/>
           </p14:sldIdLst>

--- a/neerlandais1/powerpoints/Module_28_Zich_of_elkaar.pptx
+++ b/neerlandais1/powerpoints/Module_28_Zich_of_elkaar.pptx
@@ -133,18 +133,18 @@
   <p:extLst>
     <p:ext uri="{521415D9-36F7-43E2-AB2F-B90AF26B5E84}">
       <p14:sectionLst xmlns:p14="http://schemas.microsoft.com/office/powerpoint/2010/main">
-        <p14:section name="Ouverture" id="{dfb2744b-a24f-fded-24e4-36e9200edde5}">
+        <p14:section name="Ouverture" id="{d41fde2c-93a9-7983-76a1-f225889f8767}">
           <p14:sldIdLst>
             <p14:sldId id="256"/>
           </p14:sldIdLst>
         </p14:section>
-        <p14:section name="Découvrir" id="{3f485b07-fa99-9fbd-4cb2-fe4e38103a92}">
+        <p14:section name="Découvrir" id="{62f5ec98-db95-7478-8343-a371ea9bf697}">
           <p14:sldIdLst>
             <p14:sldId id="257"/>
             <p14:sldId id="258"/>
           </p14:sldIdLst>
         </p14:section>
-        <p14:section name="Comprendre" id="{fe101d61-5583-2788-5f3f-f29df7c75833}">
+        <p14:section name="Comprendre" id="{a12576b7-877c-2f45-d213-b1bc3cd7e478}">
           <p14:sldIdLst>
             <p14:sldId id="259"/>
             <p14:sldId id="260"/>
@@ -158,7 +158,7 @@
             <p14:sldId id="268"/>
           </p14:sldIdLst>
         </p14:section>
-        <p14:section name="JIJ NU ! — Oefeningen" id="{c5f20a2c-6127-90ac-e3b8-c317bfd24f98}">
+        <p14:section name="JIJ NU ! — Oefeningen" id="{f4d33251-dee4-ea63-8597-2083f6f74a3e}">
           <p14:sldIdLst>
             <p14:sldId id="269"/>
             <p14:sldId id="270"/>
@@ -175,7 +175,7 @@
             <p14:sldId id="281"/>
           </p14:sldIdLst>
         </p14:section>
-        <p14:section name="Clôture" id="{6ca5eb26-e9ff-b53f-1fe8-4a301908b126}">
+        <p14:section name="Clôture" id="{e8162c76-113f-a5ec-8132-08f4c32aa58f}">
           <p14:sldIdLst>
             <p14:sldId id="282"/>
           </p14:sldIdLst>

--- a/neerlandais1/powerpoints/Module_28_Zich_of_elkaar.pptx
+++ b/neerlandais1/powerpoints/Module_28_Zich_of_elkaar.pptx
@@ -133,18 +133,18 @@
   <p:extLst>
     <p:ext uri="{521415D9-36F7-43E2-AB2F-B90AF26B5E84}">
       <p14:sectionLst xmlns:p14="http://schemas.microsoft.com/office/powerpoint/2010/main">
-        <p14:section name="Ouverture" id="{d41fde2c-93a9-7983-76a1-f225889f8767}">
+        <p14:section name="Ouverture" id="{74230646-e257-bf1a-8756-53f739cc9149}">
           <p14:sldIdLst>
             <p14:sldId id="256"/>
           </p14:sldIdLst>
         </p14:section>
-        <p14:section name="Découvrir" id="{62f5ec98-db95-7478-8343-a371ea9bf697}">
+        <p14:section name="Découvrir" id="{335a0f03-8951-2efe-0913-1f903aa72562}">
           <p14:sldIdLst>
             <p14:sldId id="257"/>
             <p14:sldId id="258"/>
           </p14:sldIdLst>
         </p14:section>
-        <p14:section name="Comprendre" id="{a12576b7-877c-2f45-d213-b1bc3cd7e478}">
+        <p14:section name="Comprendre" id="{fb03a8d9-11e7-daba-cc23-ae4bd98571f6}">
           <p14:sldIdLst>
             <p14:sldId id="259"/>
             <p14:sldId id="260"/>
@@ -158,7 +158,7 @@
             <p14:sldId id="268"/>
           </p14:sldIdLst>
         </p14:section>
-        <p14:section name="JIJ NU ! — Oefeningen" id="{f4d33251-dee4-ea63-8597-2083f6f74a3e}">
+        <p14:section name="JIJ NU ! — Oefeningen" id="{2381ba65-fe32-74d1-251b-16f49a2ab4d4}">
           <p14:sldIdLst>
             <p14:sldId id="269"/>
             <p14:sldId id="270"/>
@@ -175,7 +175,7 @@
             <p14:sldId id="281"/>
           </p14:sldIdLst>
         </p14:section>
-        <p14:section name="Clôture" id="{e8162c76-113f-a5ec-8132-08f4c32aa58f}">
+        <p14:section name="Clôture" id="{9f07f4ea-c959-628b-c5a6-349c2973ca1c}">
           <p14:sldIdLst>
             <p14:sldId id="282"/>
           </p14:sldIdLst>

--- a/neerlandais1/powerpoints/Module_28_Zich_of_elkaar.pptx
+++ b/neerlandais1/powerpoints/Module_28_Zich_of_elkaar.pptx
@@ -133,18 +133,18 @@
   <p:extLst>
     <p:ext uri="{521415D9-36F7-43E2-AB2F-B90AF26B5E84}">
       <p14:sectionLst xmlns:p14="http://schemas.microsoft.com/office/powerpoint/2010/main">
-        <p14:section name="Ouverture" id="{74230646-e257-bf1a-8756-53f739cc9149}">
+        <p14:section name="Ouverture" id="{0be24273-8144-7bdf-e6d2-a51a622af265}">
           <p14:sldIdLst>
             <p14:sldId id="256"/>
           </p14:sldIdLst>
         </p14:section>
-        <p14:section name="Découvrir" id="{335a0f03-8951-2efe-0913-1f903aa72562}">
+        <p14:section name="Découvrir" id="{e29ec060-931e-6af5-7dbb-43017058387c}">
           <p14:sldIdLst>
             <p14:sldId id="257"/>
             <p14:sldId id="258"/>
           </p14:sldIdLst>
         </p14:section>
-        <p14:section name="Comprendre" id="{fb03a8d9-11e7-daba-cc23-ae4bd98571f6}">
+        <p14:section name="Comprendre" id="{eb6e3c6e-92ee-4a6c-14b9-79dcfd128958}">
           <p14:sldIdLst>
             <p14:sldId id="259"/>
             <p14:sldId id="260"/>
@@ -158,7 +158,7 @@
             <p14:sldId id="268"/>
           </p14:sldIdLst>
         </p14:section>
-        <p14:section name="JIJ NU ! — Oefeningen" id="{2381ba65-fe32-74d1-251b-16f49a2ab4d4}">
+        <p14:section name="JIJ NU ! — Oefeningen" id="{5ece08eb-3a9b-0ab8-63cd-113b422b1871}">
           <p14:sldIdLst>
             <p14:sldId id="269"/>
             <p14:sldId id="270"/>
@@ -175,7 +175,7 @@
             <p14:sldId id="281"/>
           </p14:sldIdLst>
         </p14:section>
-        <p14:section name="Clôture" id="{9f07f4ea-c959-628b-c5a6-349c2973ca1c}">
+        <p14:section name="Clôture" id="{1ed0759a-2829-51f6-7ddf-14a2ea64cc47}">
           <p14:sldIdLst>
             <p14:sldId id="282"/>
           </p14:sldIdLst>

--- a/neerlandais1/powerpoints/Module_28_Zich_of_elkaar.pptx
+++ b/neerlandais1/powerpoints/Module_28_Zich_of_elkaar.pptx
@@ -133,18 +133,18 @@
   <p:extLst>
     <p:ext uri="{521415D9-36F7-43E2-AB2F-B90AF26B5E84}">
       <p14:sectionLst xmlns:p14="http://schemas.microsoft.com/office/powerpoint/2010/main">
-        <p14:section name="Ouverture" id="{0be24273-8144-7bdf-e6d2-a51a622af265}">
+        <p14:section name="Ouverture" id="{faece315-d2d6-8d44-de46-531e3c444cc7}">
           <p14:sldIdLst>
             <p14:sldId id="256"/>
           </p14:sldIdLst>
         </p14:section>
-        <p14:section name="Découvrir" id="{e29ec060-931e-6af5-7dbb-43017058387c}">
+        <p14:section name="Découvrir" id="{02bccaa8-69fc-6ef4-d712-504ac219ca4e}">
           <p14:sldIdLst>
             <p14:sldId id="257"/>
             <p14:sldId id="258"/>
           </p14:sldIdLst>
         </p14:section>
-        <p14:section name="Comprendre" id="{eb6e3c6e-92ee-4a6c-14b9-79dcfd128958}">
+        <p14:section name="Comprendre" id="{a59428be-fb18-5c62-a8a1-fd549b9354b2}">
           <p14:sldIdLst>
             <p14:sldId id="259"/>
             <p14:sldId id="260"/>
@@ -158,7 +158,7 @@
             <p14:sldId id="268"/>
           </p14:sldIdLst>
         </p14:section>
-        <p14:section name="JIJ NU ! — Oefeningen" id="{5ece08eb-3a9b-0ab8-63cd-113b422b1871}">
+        <p14:section name="JIJ NU ! — Oefeningen" id="{8d7edb63-aa95-ab25-39e8-c550e0e19181}">
           <p14:sldIdLst>
             <p14:sldId id="269"/>
             <p14:sldId id="270"/>
@@ -175,7 +175,7 @@
             <p14:sldId id="281"/>
           </p14:sldIdLst>
         </p14:section>
-        <p14:section name="Clôture" id="{1ed0759a-2829-51f6-7ddf-14a2ea64cc47}">
+        <p14:section name="Clôture" id="{64cef69b-3b33-62cf-54f0-84922ae2715b}">
           <p14:sldIdLst>
             <p14:sldId id="282"/>
           </p14:sldIdLst>

--- a/neerlandais1/powerpoints/Module_28_Zich_of_elkaar.pptx
+++ b/neerlandais1/powerpoints/Module_28_Zich_of_elkaar.pptx
@@ -133,18 +133,18 @@
   <p:extLst>
     <p:ext uri="{521415D9-36F7-43E2-AB2F-B90AF26B5E84}">
       <p14:sectionLst xmlns:p14="http://schemas.microsoft.com/office/powerpoint/2010/main">
-        <p14:section name="Ouverture" id="{faece315-d2d6-8d44-de46-531e3c444cc7}">
+        <p14:section name="Ouverture" id="{85b265b4-47e7-535f-e3f4-148c4dbd5f8a}">
           <p14:sldIdLst>
             <p14:sldId id="256"/>
           </p14:sldIdLst>
         </p14:section>
-        <p14:section name="Découvrir" id="{02bccaa8-69fc-6ef4-d712-504ac219ca4e}">
+        <p14:section name="Découvrir" id="{0530669f-d0f2-b2d6-7568-7ce9f523fde9}">
           <p14:sldIdLst>
             <p14:sldId id="257"/>
             <p14:sldId id="258"/>
           </p14:sldIdLst>
         </p14:section>
-        <p14:section name="Comprendre" id="{a59428be-fb18-5c62-a8a1-fd549b9354b2}">
+        <p14:section name="Comprendre" id="{fdf2ee7b-daff-cb22-83f3-1250b9ffd95a}">
           <p14:sldIdLst>
             <p14:sldId id="259"/>
             <p14:sldId id="260"/>
@@ -158,7 +158,7 @@
             <p14:sldId id="268"/>
           </p14:sldIdLst>
         </p14:section>
-        <p14:section name="JIJ NU ! — Oefeningen" id="{8d7edb63-aa95-ab25-39e8-c550e0e19181}">
+        <p14:section name="JIJ NU ! — Oefeningen" id="{bdc15263-c342-6f2b-82cd-ae7ce9a341c4}">
           <p14:sldIdLst>
             <p14:sldId id="269"/>
             <p14:sldId id="270"/>
@@ -175,7 +175,7 @@
             <p14:sldId id="281"/>
           </p14:sldIdLst>
         </p14:section>
-        <p14:section name="Clôture" id="{64cef69b-3b33-62cf-54f0-84922ae2715b}">
+        <p14:section name="Clôture" id="{b3cdef64-dbf3-c512-53fe-333706c2345f}">
           <p14:sldIdLst>
             <p14:sldId id="282"/>
           </p14:sldIdLst>

--- a/neerlandais1/powerpoints/Module_28_Zich_of_elkaar.pptx
+++ b/neerlandais1/powerpoints/Module_28_Zich_of_elkaar.pptx
@@ -133,18 +133,18 @@
   <p:extLst>
     <p:ext uri="{521415D9-36F7-43E2-AB2F-B90AF26B5E84}">
       <p14:sectionLst xmlns:p14="http://schemas.microsoft.com/office/powerpoint/2010/main">
-        <p14:section name="Ouverture" id="{85b265b4-47e7-535f-e3f4-148c4dbd5f8a}">
+        <p14:section name="Ouverture" id="{e70a073a-43a7-ce69-0983-691c3785f9cb}">
           <p14:sldIdLst>
             <p14:sldId id="256"/>
           </p14:sldIdLst>
         </p14:section>
-        <p14:section name="Découvrir" id="{0530669f-d0f2-b2d6-7568-7ce9f523fde9}">
+        <p14:section name="Découvrir" id="{0c4be728-adac-af0a-9c27-e023ff8d61b3}">
           <p14:sldIdLst>
             <p14:sldId id="257"/>
             <p14:sldId id="258"/>
           </p14:sldIdLst>
         </p14:section>
-        <p14:section name="Comprendre" id="{fdf2ee7b-daff-cb22-83f3-1250b9ffd95a}">
+        <p14:section name="Comprendre" id="{33c20e75-faf6-2cd1-7f85-741ca7d70939}">
           <p14:sldIdLst>
             <p14:sldId id="259"/>
             <p14:sldId id="260"/>
@@ -158,7 +158,7 @@
             <p14:sldId id="268"/>
           </p14:sldIdLst>
         </p14:section>
-        <p14:section name="JIJ NU ! — Oefeningen" id="{bdc15263-c342-6f2b-82cd-ae7ce9a341c4}">
+        <p14:section name="JIJ NU ! — Oefeningen" id="{a4d1529c-abb3-2c03-79a6-a634cf9350ba}">
           <p14:sldIdLst>
             <p14:sldId id="269"/>
             <p14:sldId id="270"/>
@@ -175,7 +175,7 @@
             <p14:sldId id="281"/>
           </p14:sldIdLst>
         </p14:section>
-        <p14:section name="Clôture" id="{b3cdef64-dbf3-c512-53fe-333706c2345f}">
+        <p14:section name="Clôture" id="{dd90a081-b8a4-69a1-64aa-5640b2513394}">
           <p14:sldIdLst>
             <p14:sldId id="282"/>
           </p14:sldIdLst>
